--- a/public/fun/pack/pptx/wedding/결혼식_03_식순중심_교정벚나무.pptx
+++ b/public/fun/pack/pptx/wedding/결혼식_03_식순중심_교정벚나무.pptx
@@ -3347,7 +3347,7 @@
             <a:r>
               <a:rPr sz="3600" b="1" i="0">
                 <a:solidFill>
-                  <a:srgbClr val="9E2E4A"/>
+                  <a:srgbClr val="721D32"/>
                 </a:solidFill>
               </a:rPr>
               <a:t>저희 결혼합니다</a:t>
@@ -3385,7 +3385,7 @@
             <a:r>
               <a:rPr sz="1700" b="0" i="1">
                 <a:solidFill>
-                  <a:srgbClr val="9E2E4A"/>
+                  <a:srgbClr val="721D32"/>
                 </a:solidFill>
               </a:rPr>
               <a:t>식은 한 시간 안에 끝납니다</a:t>
@@ -3460,7 +3460,7 @@
     <p:bg>
       <p:bgPr>
         <a:solidFill>
-          <a:srgbClr val="D1617D"/>
+          <a:srgbClr val="DB3D65"/>
         </a:solidFill>
         <a:effectLst/>
       </p:bgPr>
@@ -3533,7 +3533,7 @@
             <a:r>
               <a:rPr sz="3000" b="1" i="0">
                 <a:solidFill>
-                  <a:srgbClr val="9E2E4A"/>
+                  <a:srgbClr val="721D32"/>
                 </a:solidFill>
               </a:rPr>
               <a:t>신랑 · 신부 소개</a:t>
@@ -3556,11 +3556,11 @@
             <a:avLst/>
           </a:prstGeom>
           <a:solidFill>
-            <a:srgbClr val="F3CED7"/>
+            <a:srgbClr val="F7D4DD"/>
           </a:solidFill>
           <a:ln w="19050">
             <a:solidFill>
-              <a:srgbClr val="D1617D"/>
+              <a:srgbClr val="DB3D65"/>
             </a:solidFill>
             <a:prstDash val="dash"/>
           </a:ln>
@@ -3579,7 +3579,7 @@
             <a:r>
               <a:rPr sz="1200" b="0" i="0">
                 <a:solidFill>
-                  <a:srgbClr val="9E2E4A"/>
+                  <a:srgbClr val="721D32"/>
                 </a:solidFill>
               </a:rPr>
               <a:t>사진</a:t>
@@ -3617,7 +3617,7 @@
             <a:r>
               <a:rPr sz="1600" b="1" i="0">
                 <a:solidFill>
-                  <a:srgbClr val="9E2E4A"/>
+                  <a:srgbClr val="721D32"/>
                 </a:solidFill>
               </a:rPr>
               <a:t>신랑</a:t>
@@ -3708,11 +3708,11 @@
             <a:avLst/>
           </a:prstGeom>
           <a:solidFill>
-            <a:srgbClr val="F3CED7"/>
+            <a:srgbClr val="F7D4DD"/>
           </a:solidFill>
           <a:ln w="19050">
             <a:solidFill>
-              <a:srgbClr val="D1617D"/>
+              <a:srgbClr val="DB3D65"/>
             </a:solidFill>
             <a:prstDash val="dash"/>
           </a:ln>
@@ -3731,7 +3731,7 @@
             <a:r>
               <a:rPr sz="1200" b="0" i="0">
                 <a:solidFill>
-                  <a:srgbClr val="9E2E4A"/>
+                  <a:srgbClr val="721D32"/>
                 </a:solidFill>
               </a:rPr>
               <a:t>사진</a:t>
@@ -3769,7 +3769,7 @@
             <a:r>
               <a:rPr sz="1600" b="1" i="0">
                 <a:solidFill>
-                  <a:srgbClr val="9E2E4A"/>
+                  <a:srgbClr val="721D32"/>
                 </a:solidFill>
               </a:rPr>
               <a:t>신부</a:t>
@@ -3859,7 +3859,7 @@
     <p:bg>
       <p:bgPr>
         <a:solidFill>
-          <a:srgbClr val="D1617D"/>
+          <a:srgbClr val="DB3D65"/>
         </a:solidFill>
         <a:effectLst/>
       </p:bgPr>
@@ -3932,7 +3932,7 @@
             <a:r>
               <a:rPr sz="3000" b="1" i="0">
                 <a:solidFill>
-                  <a:srgbClr val="9E2E4A"/>
+                  <a:srgbClr val="721D32"/>
                 </a:solidFill>
               </a:rPr>
               <a:t>식순 안내</a:t>
@@ -3983,30 +3983,30 @@
                   <a:tcPr anchor="ctr" marL="73152" marR="73152">
                     <a:lnL w="9525" cap="flat" cmpd="sng" algn="ctr">
                       <a:solidFill>
-                        <a:srgbClr val="D1617D"/>
+                        <a:srgbClr val="DB3D65"/>
                       </a:solidFill>
                       <a:prstDash val="solid"/>
                     </a:lnL>
                     <a:lnR w="9525" cap="flat" cmpd="sng" algn="ctr">
                       <a:solidFill>
-                        <a:srgbClr val="D1617D"/>
+                        <a:srgbClr val="DB3D65"/>
                       </a:solidFill>
                       <a:prstDash val="solid"/>
                     </a:lnR>
                     <a:lnT w="9525" cap="flat" cmpd="sng" algn="ctr">
                       <a:solidFill>
-                        <a:srgbClr val="D1617D"/>
+                        <a:srgbClr val="DB3D65"/>
                       </a:solidFill>
                       <a:prstDash val="solid"/>
                     </a:lnT>
                     <a:lnB w="9525" cap="flat" cmpd="sng" algn="ctr">
                       <a:solidFill>
-                        <a:srgbClr val="D1617D"/>
+                        <a:srgbClr val="DB3D65"/>
                       </a:solidFill>
                       <a:prstDash val="solid"/>
                     </a:lnB>
                     <a:solidFill>
-                      <a:srgbClr val="D1617D"/>
+                      <a:srgbClr val="DB3D65"/>
                     </a:solidFill>
                   </a:tcPr>
                 </a:tc>
@@ -4029,30 +4029,30 @@
                   <a:tcPr anchor="ctr" marL="73152" marR="73152">
                     <a:lnL w="9525" cap="flat" cmpd="sng" algn="ctr">
                       <a:solidFill>
-                        <a:srgbClr val="D1617D"/>
+                        <a:srgbClr val="DB3D65"/>
                       </a:solidFill>
                       <a:prstDash val="solid"/>
                     </a:lnL>
                     <a:lnR w="9525" cap="flat" cmpd="sng" algn="ctr">
                       <a:solidFill>
-                        <a:srgbClr val="D1617D"/>
+                        <a:srgbClr val="DB3D65"/>
                       </a:solidFill>
                       <a:prstDash val="solid"/>
                     </a:lnR>
                     <a:lnT w="9525" cap="flat" cmpd="sng" algn="ctr">
                       <a:solidFill>
-                        <a:srgbClr val="D1617D"/>
+                        <a:srgbClr val="DB3D65"/>
                       </a:solidFill>
                       <a:prstDash val="solid"/>
                     </a:lnT>
                     <a:lnB w="9525" cap="flat" cmpd="sng" algn="ctr">
                       <a:solidFill>
-                        <a:srgbClr val="D1617D"/>
+                        <a:srgbClr val="DB3D65"/>
                       </a:solidFill>
                       <a:prstDash val="solid"/>
                     </a:lnB>
                     <a:solidFill>
-                      <a:srgbClr val="D1617D"/>
+                      <a:srgbClr val="DB3D65"/>
                     </a:solidFill>
                   </a:tcPr>
                 </a:tc>
@@ -4075,30 +4075,30 @@
                   <a:tcPr anchor="ctr" marL="73152" marR="73152">
                     <a:lnL w="9525" cap="flat" cmpd="sng" algn="ctr">
                       <a:solidFill>
-                        <a:srgbClr val="D1617D"/>
+                        <a:srgbClr val="DB3D65"/>
                       </a:solidFill>
                       <a:prstDash val="solid"/>
                     </a:lnL>
                     <a:lnR w="9525" cap="flat" cmpd="sng" algn="ctr">
                       <a:solidFill>
-                        <a:srgbClr val="D1617D"/>
+                        <a:srgbClr val="DB3D65"/>
                       </a:solidFill>
                       <a:prstDash val="solid"/>
                     </a:lnR>
                     <a:lnT w="9525" cap="flat" cmpd="sng" algn="ctr">
                       <a:solidFill>
-                        <a:srgbClr val="D1617D"/>
+                        <a:srgbClr val="DB3D65"/>
                       </a:solidFill>
                       <a:prstDash val="solid"/>
                     </a:lnT>
                     <a:lnB w="9525" cap="flat" cmpd="sng" algn="ctr">
                       <a:solidFill>
-                        <a:srgbClr val="D1617D"/>
+                        <a:srgbClr val="DB3D65"/>
                       </a:solidFill>
                       <a:prstDash val="solid"/>
                     </a:lnB>
                     <a:solidFill>
-                      <a:srgbClr val="D1617D"/>
+                      <a:srgbClr val="DB3D65"/>
                     </a:solidFill>
                   </a:tcPr>
                 </a:tc>
@@ -4113,7 +4113,7 @@
                       <a:r>
                         <a:rPr sz="1500" b="1">
                           <a:solidFill>
-                            <a:srgbClr val="9E2E4A"/>
+                            <a:srgbClr val="721D32"/>
                           </a:solidFill>
                         </a:rPr>
                         <a:t>00:00</a:t>
@@ -4123,30 +4123,30 @@
                   <a:tcPr anchor="ctr" marL="73152" marR="73152">
                     <a:lnL w="9525" cap="flat" cmpd="sng" algn="ctr">
                       <a:solidFill>
-                        <a:srgbClr val="F3CED7"/>
+                        <a:srgbClr val="F7D4DD"/>
                       </a:solidFill>
                       <a:prstDash val="solid"/>
                     </a:lnL>
                     <a:lnR w="9525" cap="flat" cmpd="sng" algn="ctr">
                       <a:solidFill>
-                        <a:srgbClr val="F3CED7"/>
+                        <a:srgbClr val="F7D4DD"/>
                       </a:solidFill>
                       <a:prstDash val="solid"/>
                     </a:lnR>
                     <a:lnT w="9525" cap="flat" cmpd="sng" algn="ctr">
                       <a:solidFill>
-                        <a:srgbClr val="F3CED7"/>
+                        <a:srgbClr val="F7D4DD"/>
                       </a:solidFill>
                       <a:prstDash val="solid"/>
                     </a:lnT>
                     <a:lnB w="9525" cap="flat" cmpd="sng" algn="ctr">
                       <a:solidFill>
-                        <a:srgbClr val="F3CED7"/>
+                        <a:srgbClr val="F7D4DD"/>
                       </a:solidFill>
                       <a:prstDash val="solid"/>
                     </a:lnB>
                     <a:solidFill>
-                      <a:srgbClr val="F3CED7"/>
+                      <a:srgbClr val="F7D4DD"/>
                     </a:solidFill>
                   </a:tcPr>
                 </a:tc>
@@ -4169,25 +4169,25 @@
                   <a:tcPr anchor="ctr" marL="73152" marR="73152">
                     <a:lnL w="9525" cap="flat" cmpd="sng" algn="ctr">
                       <a:solidFill>
-                        <a:srgbClr val="F3CED7"/>
+                        <a:srgbClr val="F7D4DD"/>
                       </a:solidFill>
                       <a:prstDash val="solid"/>
                     </a:lnL>
                     <a:lnR w="9525" cap="flat" cmpd="sng" algn="ctr">
                       <a:solidFill>
-                        <a:srgbClr val="F3CED7"/>
+                        <a:srgbClr val="F7D4DD"/>
                       </a:solidFill>
                       <a:prstDash val="solid"/>
                     </a:lnR>
                     <a:lnT w="9525" cap="flat" cmpd="sng" algn="ctr">
                       <a:solidFill>
-                        <a:srgbClr val="F3CED7"/>
+                        <a:srgbClr val="F7D4DD"/>
                       </a:solidFill>
                       <a:prstDash val="solid"/>
                     </a:lnT>
                     <a:lnB w="9525" cap="flat" cmpd="sng" algn="ctr">
                       <a:solidFill>
-                        <a:srgbClr val="F3CED7"/>
+                        <a:srgbClr val="F7D4DD"/>
                       </a:solidFill>
                       <a:prstDash val="solid"/>
                     </a:lnB>
@@ -4215,25 +4215,25 @@
                   <a:tcPr anchor="ctr" marL="73152" marR="73152">
                     <a:lnL w="9525" cap="flat" cmpd="sng" algn="ctr">
                       <a:solidFill>
-                        <a:srgbClr val="F3CED7"/>
+                        <a:srgbClr val="F7D4DD"/>
                       </a:solidFill>
                       <a:prstDash val="solid"/>
                     </a:lnL>
                     <a:lnR w="9525" cap="flat" cmpd="sng" algn="ctr">
                       <a:solidFill>
-                        <a:srgbClr val="F3CED7"/>
+                        <a:srgbClr val="F7D4DD"/>
                       </a:solidFill>
                       <a:prstDash val="solid"/>
                     </a:lnR>
                     <a:lnT w="9525" cap="flat" cmpd="sng" algn="ctr">
                       <a:solidFill>
-                        <a:srgbClr val="F3CED7"/>
+                        <a:srgbClr val="F7D4DD"/>
                       </a:solidFill>
                       <a:prstDash val="solid"/>
                     </a:lnT>
                     <a:lnB w="9525" cap="flat" cmpd="sng" algn="ctr">
                       <a:solidFill>
-                        <a:srgbClr val="F3CED7"/>
+                        <a:srgbClr val="F7D4DD"/>
                       </a:solidFill>
                       <a:prstDash val="solid"/>
                     </a:lnB>
@@ -4253,7 +4253,7 @@
                       <a:r>
                         <a:rPr sz="1500" b="1">
                           <a:solidFill>
-                            <a:srgbClr val="9E2E4A"/>
+                            <a:srgbClr val="721D32"/>
                           </a:solidFill>
                         </a:rPr>
                         <a:t>00:00</a:t>
@@ -4263,30 +4263,30 @@
                   <a:tcPr anchor="ctr" marL="73152" marR="73152">
                     <a:lnL w="9525" cap="flat" cmpd="sng" algn="ctr">
                       <a:solidFill>
-                        <a:srgbClr val="F3CED7"/>
+                        <a:srgbClr val="F7D4DD"/>
                       </a:solidFill>
                       <a:prstDash val="solid"/>
                     </a:lnL>
                     <a:lnR w="9525" cap="flat" cmpd="sng" algn="ctr">
                       <a:solidFill>
-                        <a:srgbClr val="F3CED7"/>
+                        <a:srgbClr val="F7D4DD"/>
                       </a:solidFill>
                       <a:prstDash val="solid"/>
                     </a:lnR>
                     <a:lnT w="9525" cap="flat" cmpd="sng" algn="ctr">
                       <a:solidFill>
-                        <a:srgbClr val="F3CED7"/>
+                        <a:srgbClr val="F7D4DD"/>
                       </a:solidFill>
                       <a:prstDash val="solid"/>
                     </a:lnT>
                     <a:lnB w="9525" cap="flat" cmpd="sng" algn="ctr">
                       <a:solidFill>
-                        <a:srgbClr val="F3CED7"/>
+                        <a:srgbClr val="F7D4DD"/>
                       </a:solidFill>
                       <a:prstDash val="solid"/>
                     </a:lnB>
                     <a:solidFill>
-                      <a:srgbClr val="F3CED7"/>
+                      <a:srgbClr val="F7D4DD"/>
                     </a:solidFill>
                   </a:tcPr>
                 </a:tc>
@@ -4309,30 +4309,30 @@
                   <a:tcPr anchor="ctr" marL="73152" marR="73152">
                     <a:lnL w="9525" cap="flat" cmpd="sng" algn="ctr">
                       <a:solidFill>
-                        <a:srgbClr val="F3CED7"/>
+                        <a:srgbClr val="F7D4DD"/>
                       </a:solidFill>
                       <a:prstDash val="solid"/>
                     </a:lnL>
                     <a:lnR w="9525" cap="flat" cmpd="sng" algn="ctr">
                       <a:solidFill>
-                        <a:srgbClr val="F3CED7"/>
+                        <a:srgbClr val="F7D4DD"/>
                       </a:solidFill>
                       <a:prstDash val="solid"/>
                     </a:lnR>
                     <a:lnT w="9525" cap="flat" cmpd="sng" algn="ctr">
                       <a:solidFill>
-                        <a:srgbClr val="F3CED7"/>
+                        <a:srgbClr val="F7D4DD"/>
                       </a:solidFill>
                       <a:prstDash val="solid"/>
                     </a:lnT>
                     <a:lnB w="9525" cap="flat" cmpd="sng" algn="ctr">
                       <a:solidFill>
-                        <a:srgbClr val="F3CED7"/>
+                        <a:srgbClr val="F7D4DD"/>
                       </a:solidFill>
                       <a:prstDash val="solid"/>
                     </a:lnB>
                     <a:solidFill>
-                      <a:srgbClr val="FAEFF2"/>
+                      <a:srgbClr val="FCF3F5"/>
                     </a:solidFill>
                   </a:tcPr>
                 </a:tc>
@@ -4355,30 +4355,30 @@
                   <a:tcPr anchor="ctr" marL="73152" marR="73152">
                     <a:lnL w="9525" cap="flat" cmpd="sng" algn="ctr">
                       <a:solidFill>
-                        <a:srgbClr val="F3CED7"/>
+                        <a:srgbClr val="F7D4DD"/>
                       </a:solidFill>
                       <a:prstDash val="solid"/>
                     </a:lnL>
                     <a:lnR w="9525" cap="flat" cmpd="sng" algn="ctr">
                       <a:solidFill>
-                        <a:srgbClr val="F3CED7"/>
+                        <a:srgbClr val="F7D4DD"/>
                       </a:solidFill>
                       <a:prstDash val="solid"/>
                     </a:lnR>
                     <a:lnT w="9525" cap="flat" cmpd="sng" algn="ctr">
                       <a:solidFill>
-                        <a:srgbClr val="F3CED7"/>
+                        <a:srgbClr val="F7D4DD"/>
                       </a:solidFill>
                       <a:prstDash val="solid"/>
                     </a:lnT>
                     <a:lnB w="9525" cap="flat" cmpd="sng" algn="ctr">
                       <a:solidFill>
-                        <a:srgbClr val="F3CED7"/>
+                        <a:srgbClr val="F7D4DD"/>
                       </a:solidFill>
                       <a:prstDash val="solid"/>
                     </a:lnB>
                     <a:solidFill>
-                      <a:srgbClr val="FAEFF2"/>
+                      <a:srgbClr val="FCF3F5"/>
                     </a:solidFill>
                   </a:tcPr>
                 </a:tc>
@@ -4393,7 +4393,7 @@
                       <a:r>
                         <a:rPr sz="1500" b="1">
                           <a:solidFill>
-                            <a:srgbClr val="9E2E4A"/>
+                            <a:srgbClr val="721D32"/>
                           </a:solidFill>
                         </a:rPr>
                         <a:t>00:00</a:t>
@@ -4403,30 +4403,30 @@
                   <a:tcPr anchor="ctr" marL="73152" marR="73152">
                     <a:lnL w="9525" cap="flat" cmpd="sng" algn="ctr">
                       <a:solidFill>
-                        <a:srgbClr val="F3CED7"/>
+                        <a:srgbClr val="F7D4DD"/>
                       </a:solidFill>
                       <a:prstDash val="solid"/>
                     </a:lnL>
                     <a:lnR w="9525" cap="flat" cmpd="sng" algn="ctr">
                       <a:solidFill>
-                        <a:srgbClr val="F3CED7"/>
+                        <a:srgbClr val="F7D4DD"/>
                       </a:solidFill>
                       <a:prstDash val="solid"/>
                     </a:lnR>
                     <a:lnT w="9525" cap="flat" cmpd="sng" algn="ctr">
                       <a:solidFill>
-                        <a:srgbClr val="F3CED7"/>
+                        <a:srgbClr val="F7D4DD"/>
                       </a:solidFill>
                       <a:prstDash val="solid"/>
                     </a:lnT>
                     <a:lnB w="9525" cap="flat" cmpd="sng" algn="ctr">
                       <a:solidFill>
-                        <a:srgbClr val="F3CED7"/>
+                        <a:srgbClr val="F7D4DD"/>
                       </a:solidFill>
                       <a:prstDash val="solid"/>
                     </a:lnB>
                     <a:solidFill>
-                      <a:srgbClr val="F3CED7"/>
+                      <a:srgbClr val="F7D4DD"/>
                     </a:solidFill>
                   </a:tcPr>
                 </a:tc>
@@ -4449,25 +4449,25 @@
                   <a:tcPr anchor="ctr" marL="73152" marR="73152">
                     <a:lnL w="9525" cap="flat" cmpd="sng" algn="ctr">
                       <a:solidFill>
-                        <a:srgbClr val="F3CED7"/>
+                        <a:srgbClr val="F7D4DD"/>
                       </a:solidFill>
                       <a:prstDash val="solid"/>
                     </a:lnL>
                     <a:lnR w="9525" cap="flat" cmpd="sng" algn="ctr">
                       <a:solidFill>
-                        <a:srgbClr val="F3CED7"/>
+                        <a:srgbClr val="F7D4DD"/>
                       </a:solidFill>
                       <a:prstDash val="solid"/>
                     </a:lnR>
                     <a:lnT w="9525" cap="flat" cmpd="sng" algn="ctr">
                       <a:solidFill>
-                        <a:srgbClr val="F3CED7"/>
+                        <a:srgbClr val="F7D4DD"/>
                       </a:solidFill>
                       <a:prstDash val="solid"/>
                     </a:lnT>
                     <a:lnB w="9525" cap="flat" cmpd="sng" algn="ctr">
                       <a:solidFill>
-                        <a:srgbClr val="F3CED7"/>
+                        <a:srgbClr val="F7D4DD"/>
                       </a:solidFill>
                       <a:prstDash val="solid"/>
                     </a:lnB>
@@ -4495,25 +4495,25 @@
                   <a:tcPr anchor="ctr" marL="73152" marR="73152">
                     <a:lnL w="9525" cap="flat" cmpd="sng" algn="ctr">
                       <a:solidFill>
-                        <a:srgbClr val="F3CED7"/>
+                        <a:srgbClr val="F7D4DD"/>
                       </a:solidFill>
                       <a:prstDash val="solid"/>
                     </a:lnL>
                     <a:lnR w="9525" cap="flat" cmpd="sng" algn="ctr">
                       <a:solidFill>
-                        <a:srgbClr val="F3CED7"/>
+                        <a:srgbClr val="F7D4DD"/>
                       </a:solidFill>
                       <a:prstDash val="solid"/>
                     </a:lnR>
                     <a:lnT w="9525" cap="flat" cmpd="sng" algn="ctr">
                       <a:solidFill>
-                        <a:srgbClr val="F3CED7"/>
+                        <a:srgbClr val="F7D4DD"/>
                       </a:solidFill>
                       <a:prstDash val="solid"/>
                     </a:lnT>
                     <a:lnB w="9525" cap="flat" cmpd="sng" algn="ctr">
                       <a:solidFill>
-                        <a:srgbClr val="F3CED7"/>
+                        <a:srgbClr val="F7D4DD"/>
                       </a:solidFill>
                       <a:prstDash val="solid"/>
                     </a:lnB>
@@ -4533,7 +4533,7 @@
                       <a:r>
                         <a:rPr sz="1500" b="1">
                           <a:solidFill>
-                            <a:srgbClr val="9E2E4A"/>
+                            <a:srgbClr val="721D32"/>
                           </a:solidFill>
                         </a:rPr>
                         <a:t>00:00</a:t>
@@ -4543,30 +4543,30 @@
                   <a:tcPr anchor="ctr" marL="73152" marR="73152">
                     <a:lnL w="9525" cap="flat" cmpd="sng" algn="ctr">
                       <a:solidFill>
-                        <a:srgbClr val="F3CED7"/>
+                        <a:srgbClr val="F7D4DD"/>
                       </a:solidFill>
                       <a:prstDash val="solid"/>
                     </a:lnL>
                     <a:lnR w="9525" cap="flat" cmpd="sng" algn="ctr">
                       <a:solidFill>
-                        <a:srgbClr val="F3CED7"/>
+                        <a:srgbClr val="F7D4DD"/>
                       </a:solidFill>
                       <a:prstDash val="solid"/>
                     </a:lnR>
                     <a:lnT w="9525" cap="flat" cmpd="sng" algn="ctr">
                       <a:solidFill>
-                        <a:srgbClr val="F3CED7"/>
+                        <a:srgbClr val="F7D4DD"/>
                       </a:solidFill>
                       <a:prstDash val="solid"/>
                     </a:lnT>
                     <a:lnB w="9525" cap="flat" cmpd="sng" algn="ctr">
                       <a:solidFill>
-                        <a:srgbClr val="F3CED7"/>
+                        <a:srgbClr val="F7D4DD"/>
                       </a:solidFill>
                       <a:prstDash val="solid"/>
                     </a:lnB>
                     <a:solidFill>
-                      <a:srgbClr val="F3CED7"/>
+                      <a:srgbClr val="F7D4DD"/>
                     </a:solidFill>
                   </a:tcPr>
                 </a:tc>
@@ -4589,30 +4589,30 @@
                   <a:tcPr anchor="ctr" marL="73152" marR="73152">
                     <a:lnL w="9525" cap="flat" cmpd="sng" algn="ctr">
                       <a:solidFill>
-                        <a:srgbClr val="F3CED7"/>
+                        <a:srgbClr val="F7D4DD"/>
                       </a:solidFill>
                       <a:prstDash val="solid"/>
                     </a:lnL>
                     <a:lnR w="9525" cap="flat" cmpd="sng" algn="ctr">
                       <a:solidFill>
-                        <a:srgbClr val="F3CED7"/>
+                        <a:srgbClr val="F7D4DD"/>
                       </a:solidFill>
                       <a:prstDash val="solid"/>
                     </a:lnR>
                     <a:lnT w="9525" cap="flat" cmpd="sng" algn="ctr">
                       <a:solidFill>
-                        <a:srgbClr val="F3CED7"/>
+                        <a:srgbClr val="F7D4DD"/>
                       </a:solidFill>
                       <a:prstDash val="solid"/>
                     </a:lnT>
                     <a:lnB w="9525" cap="flat" cmpd="sng" algn="ctr">
                       <a:solidFill>
-                        <a:srgbClr val="F3CED7"/>
+                        <a:srgbClr val="F7D4DD"/>
                       </a:solidFill>
                       <a:prstDash val="solid"/>
                     </a:lnB>
                     <a:solidFill>
-                      <a:srgbClr val="FAEFF2"/>
+                      <a:srgbClr val="FCF3F5"/>
                     </a:solidFill>
                   </a:tcPr>
                 </a:tc>
@@ -4635,30 +4635,30 @@
                   <a:tcPr anchor="ctr" marL="73152" marR="73152">
                     <a:lnL w="9525" cap="flat" cmpd="sng" algn="ctr">
                       <a:solidFill>
-                        <a:srgbClr val="F3CED7"/>
+                        <a:srgbClr val="F7D4DD"/>
                       </a:solidFill>
                       <a:prstDash val="solid"/>
                     </a:lnL>
                     <a:lnR w="9525" cap="flat" cmpd="sng" algn="ctr">
                       <a:solidFill>
-                        <a:srgbClr val="F3CED7"/>
+                        <a:srgbClr val="F7D4DD"/>
                       </a:solidFill>
                       <a:prstDash val="solid"/>
                     </a:lnR>
                     <a:lnT w="9525" cap="flat" cmpd="sng" algn="ctr">
                       <a:solidFill>
-                        <a:srgbClr val="F3CED7"/>
+                        <a:srgbClr val="F7D4DD"/>
                       </a:solidFill>
                       <a:prstDash val="solid"/>
                     </a:lnT>
                     <a:lnB w="9525" cap="flat" cmpd="sng" algn="ctr">
                       <a:solidFill>
-                        <a:srgbClr val="F3CED7"/>
+                        <a:srgbClr val="F7D4DD"/>
                       </a:solidFill>
                       <a:prstDash val="solid"/>
                     </a:lnB>
                     <a:solidFill>
-                      <a:srgbClr val="FAEFF2"/>
+                      <a:srgbClr val="FCF3F5"/>
                     </a:solidFill>
                   </a:tcPr>
                 </a:tc>
@@ -4673,7 +4673,7 @@
                       <a:r>
                         <a:rPr sz="1500" b="1">
                           <a:solidFill>
-                            <a:srgbClr val="9E2E4A"/>
+                            <a:srgbClr val="721D32"/>
                           </a:solidFill>
                         </a:rPr>
                         <a:t>00:00</a:t>
@@ -4683,30 +4683,30 @@
                   <a:tcPr anchor="ctr" marL="73152" marR="73152">
                     <a:lnL w="9525" cap="flat" cmpd="sng" algn="ctr">
                       <a:solidFill>
-                        <a:srgbClr val="F3CED7"/>
+                        <a:srgbClr val="F7D4DD"/>
                       </a:solidFill>
                       <a:prstDash val="solid"/>
                     </a:lnL>
                     <a:lnR w="9525" cap="flat" cmpd="sng" algn="ctr">
                       <a:solidFill>
-                        <a:srgbClr val="F3CED7"/>
+                        <a:srgbClr val="F7D4DD"/>
                       </a:solidFill>
                       <a:prstDash val="solid"/>
                     </a:lnR>
                     <a:lnT w="9525" cap="flat" cmpd="sng" algn="ctr">
                       <a:solidFill>
-                        <a:srgbClr val="F3CED7"/>
+                        <a:srgbClr val="F7D4DD"/>
                       </a:solidFill>
                       <a:prstDash val="solid"/>
                     </a:lnT>
                     <a:lnB w="9525" cap="flat" cmpd="sng" algn="ctr">
                       <a:solidFill>
-                        <a:srgbClr val="F3CED7"/>
+                        <a:srgbClr val="F7D4DD"/>
                       </a:solidFill>
                       <a:prstDash val="solid"/>
                     </a:lnB>
                     <a:solidFill>
-                      <a:srgbClr val="F3CED7"/>
+                      <a:srgbClr val="F7D4DD"/>
                     </a:solidFill>
                   </a:tcPr>
                 </a:tc>
@@ -4729,25 +4729,25 @@
                   <a:tcPr anchor="ctr" marL="73152" marR="73152">
                     <a:lnL w="9525" cap="flat" cmpd="sng" algn="ctr">
                       <a:solidFill>
-                        <a:srgbClr val="F3CED7"/>
+                        <a:srgbClr val="F7D4DD"/>
                       </a:solidFill>
                       <a:prstDash val="solid"/>
                     </a:lnL>
                     <a:lnR w="9525" cap="flat" cmpd="sng" algn="ctr">
                       <a:solidFill>
-                        <a:srgbClr val="F3CED7"/>
+                        <a:srgbClr val="F7D4DD"/>
                       </a:solidFill>
                       <a:prstDash val="solid"/>
                     </a:lnR>
                     <a:lnT w="9525" cap="flat" cmpd="sng" algn="ctr">
                       <a:solidFill>
-                        <a:srgbClr val="F3CED7"/>
+                        <a:srgbClr val="F7D4DD"/>
                       </a:solidFill>
                       <a:prstDash val="solid"/>
                     </a:lnT>
                     <a:lnB w="9525" cap="flat" cmpd="sng" algn="ctr">
                       <a:solidFill>
-                        <a:srgbClr val="F3CED7"/>
+                        <a:srgbClr val="F7D4DD"/>
                       </a:solidFill>
                       <a:prstDash val="solid"/>
                     </a:lnB>
@@ -4775,25 +4775,25 @@
                   <a:tcPr anchor="ctr" marL="73152" marR="73152">
                     <a:lnL w="9525" cap="flat" cmpd="sng" algn="ctr">
                       <a:solidFill>
-                        <a:srgbClr val="F3CED7"/>
+                        <a:srgbClr val="F7D4DD"/>
                       </a:solidFill>
                       <a:prstDash val="solid"/>
                     </a:lnL>
                     <a:lnR w="9525" cap="flat" cmpd="sng" algn="ctr">
                       <a:solidFill>
-                        <a:srgbClr val="F3CED7"/>
+                        <a:srgbClr val="F7D4DD"/>
                       </a:solidFill>
                       <a:prstDash val="solid"/>
                     </a:lnR>
                     <a:lnT w="9525" cap="flat" cmpd="sng" algn="ctr">
                       <a:solidFill>
-                        <a:srgbClr val="F3CED7"/>
+                        <a:srgbClr val="F7D4DD"/>
                       </a:solidFill>
                       <a:prstDash val="solid"/>
                     </a:lnT>
                     <a:lnB w="9525" cap="flat" cmpd="sng" algn="ctr">
                       <a:solidFill>
-                        <a:srgbClr val="F3CED7"/>
+                        <a:srgbClr val="F7D4DD"/>
                       </a:solidFill>
                       <a:prstDash val="solid"/>
                     </a:lnB>
@@ -4821,7 +4821,7 @@
     <p:bg>
       <p:bgPr>
         <a:solidFill>
-          <a:srgbClr val="D1617D"/>
+          <a:srgbClr val="DB3D65"/>
         </a:solidFill>
         <a:effectLst/>
       </p:bgPr>
@@ -4894,7 +4894,7 @@
             <a:r>
               <a:rPr sz="3000" b="1" i="0">
                 <a:solidFill>
-                  <a:srgbClr val="9E2E4A"/>
+                  <a:srgbClr val="721D32"/>
                 </a:solidFill>
               </a:rPr>
               <a:t>하객 안내</a:t>
@@ -4919,11 +4919,11 @@
             </a:avLst>
           </a:prstGeom>
           <a:solidFill>
-            <a:srgbClr val="FAEFF2"/>
+            <a:srgbClr val="FCF3F5"/>
           </a:solidFill>
           <a:ln w="15875">
             <a:solidFill>
-              <a:srgbClr val="F3CED7"/>
+              <a:srgbClr val="F7D4DD"/>
             </a:solidFill>
           </a:ln>
         </p:spPr>
@@ -4950,7 +4950,7 @@
             <a:avLst/>
           </a:prstGeom>
           <a:solidFill>
-            <a:srgbClr val="D1617D"/>
+            <a:srgbClr val="DB3D65"/>
           </a:solidFill>
           <a:ln>
             <a:noFill/>
@@ -5008,7 +5008,7 @@
             <a:r>
               <a:rPr sz="1800" b="1" i="0">
                 <a:solidFill>
-                  <a:srgbClr val="9E2E4A"/>
+                  <a:srgbClr val="721D32"/>
                 </a:solidFill>
               </a:rPr>
               <a:t>주차 안내</a:t>
@@ -5071,11 +5071,11 @@
             </a:avLst>
           </a:prstGeom>
           <a:solidFill>
-            <a:srgbClr val="FAEFF2"/>
+            <a:srgbClr val="FCF3F5"/>
           </a:solidFill>
           <a:ln w="15875">
             <a:solidFill>
-              <a:srgbClr val="F3CED7"/>
+              <a:srgbClr val="F7D4DD"/>
             </a:solidFill>
           </a:ln>
         </p:spPr>
@@ -5102,7 +5102,7 @@
             <a:avLst/>
           </a:prstGeom>
           <a:solidFill>
-            <a:srgbClr val="D1617D"/>
+            <a:srgbClr val="DB3D65"/>
           </a:solidFill>
           <a:ln>
             <a:noFill/>
@@ -5160,7 +5160,7 @@
             <a:r>
               <a:rPr sz="1800" b="1" i="0">
                 <a:solidFill>
-                  <a:srgbClr val="9E2E4A"/>
+                  <a:srgbClr val="721D32"/>
                 </a:solidFill>
               </a:rPr>
               <a:t>식사 안내</a:t>
@@ -5223,11 +5223,11 @@
             </a:avLst>
           </a:prstGeom>
           <a:solidFill>
-            <a:srgbClr val="FAEFF2"/>
+            <a:srgbClr val="FCF3F5"/>
           </a:solidFill>
           <a:ln w="15875">
             <a:solidFill>
-              <a:srgbClr val="F3CED7"/>
+              <a:srgbClr val="F7D4DD"/>
             </a:solidFill>
           </a:ln>
         </p:spPr>
@@ -5254,7 +5254,7 @@
             <a:avLst/>
           </a:prstGeom>
           <a:solidFill>
-            <a:srgbClr val="D1617D"/>
+            <a:srgbClr val="DB3D65"/>
           </a:solidFill>
           <a:ln>
             <a:noFill/>
@@ -5312,7 +5312,7 @@
             <a:r>
               <a:rPr sz="1800" b="1" i="0">
                 <a:solidFill>
-                  <a:srgbClr val="9E2E4A"/>
+                  <a:srgbClr val="721D32"/>
                 </a:solidFill>
               </a:rPr>
               <a:t>기념 촬영</a:t>
@@ -5372,7 +5372,7 @@
     <p:bg>
       <p:bgPr>
         <a:solidFill>
-          <a:srgbClr val="D1617D"/>
+          <a:srgbClr val="DB3D65"/>
         </a:solidFill>
         <a:effectLst/>
       </p:bgPr>
@@ -5445,7 +5445,7 @@
             <a:r>
               <a:rPr sz="3000" b="1" i="0">
                 <a:solidFill>
-                  <a:srgbClr val="9E2E4A"/>
+                  <a:srgbClr val="721D32"/>
                 </a:solidFill>
               </a:rPr>
               <a:t>웨딩 사진</a:t>
@@ -5470,11 +5470,11 @@
             </a:avLst>
           </a:prstGeom>
           <a:solidFill>
-            <a:srgbClr val="F3CED7"/>
+            <a:srgbClr val="F7D4DD"/>
           </a:solidFill>
           <a:ln w="19050">
             <a:solidFill>
-              <a:srgbClr val="D1617D"/>
+              <a:srgbClr val="DB3D65"/>
             </a:solidFill>
             <a:prstDash val="dash"/>
           </a:ln>
@@ -5493,7 +5493,7 @@
             <a:r>
               <a:rPr sz="1200" b="0" i="0">
                 <a:solidFill>
-                  <a:srgbClr val="9E2E4A"/>
+                  <a:srgbClr val="721D32"/>
                 </a:solidFill>
               </a:rPr>
               <a:t>사진 1</a:t>
@@ -5518,11 +5518,11 @@
             </a:avLst>
           </a:prstGeom>
           <a:solidFill>
-            <a:srgbClr val="F3CED7"/>
+            <a:srgbClr val="F7D4DD"/>
           </a:solidFill>
           <a:ln w="19050">
             <a:solidFill>
-              <a:srgbClr val="D1617D"/>
+              <a:srgbClr val="DB3D65"/>
             </a:solidFill>
             <a:prstDash val="dash"/>
           </a:ln>
@@ -5541,7 +5541,7 @@
             <a:r>
               <a:rPr sz="1200" b="0" i="0">
                 <a:solidFill>
-                  <a:srgbClr val="9E2E4A"/>
+                  <a:srgbClr val="721D32"/>
                 </a:solidFill>
               </a:rPr>
               <a:t>사진 2</a:t>
@@ -5566,11 +5566,11 @@
             </a:avLst>
           </a:prstGeom>
           <a:solidFill>
-            <a:srgbClr val="F3CED7"/>
+            <a:srgbClr val="F7D4DD"/>
           </a:solidFill>
           <a:ln w="19050">
             <a:solidFill>
-              <a:srgbClr val="D1617D"/>
+              <a:srgbClr val="DB3D65"/>
             </a:solidFill>
             <a:prstDash val="dash"/>
           </a:ln>
@@ -5589,7 +5589,7 @@
             <a:r>
               <a:rPr sz="1200" b="0" i="0">
                 <a:solidFill>
-                  <a:srgbClr val="9E2E4A"/>
+                  <a:srgbClr val="721D32"/>
                 </a:solidFill>
               </a:rPr>
               <a:t>사진 3</a:t>
@@ -5614,11 +5614,11 @@
             </a:avLst>
           </a:prstGeom>
           <a:solidFill>
-            <a:srgbClr val="F3CED7"/>
+            <a:srgbClr val="F7D4DD"/>
           </a:solidFill>
           <a:ln w="19050">
             <a:solidFill>
-              <a:srgbClr val="D1617D"/>
+              <a:srgbClr val="DB3D65"/>
             </a:solidFill>
             <a:prstDash val="dash"/>
           </a:ln>
@@ -5637,7 +5637,7 @@
             <a:r>
               <a:rPr sz="1200" b="0" i="0">
                 <a:solidFill>
-                  <a:srgbClr val="9E2E4A"/>
+                  <a:srgbClr val="721D32"/>
                 </a:solidFill>
               </a:rPr>
               <a:t>사진 4</a:t>
@@ -5662,11 +5662,11 @@
             </a:avLst>
           </a:prstGeom>
           <a:solidFill>
-            <a:srgbClr val="F3CED7"/>
+            <a:srgbClr val="F7D4DD"/>
           </a:solidFill>
           <a:ln w="19050">
             <a:solidFill>
-              <a:srgbClr val="D1617D"/>
+              <a:srgbClr val="DB3D65"/>
             </a:solidFill>
             <a:prstDash val="dash"/>
           </a:ln>
@@ -5685,7 +5685,7 @@
             <a:r>
               <a:rPr sz="1200" b="0" i="0">
                 <a:solidFill>
-                  <a:srgbClr val="9E2E4A"/>
+                  <a:srgbClr val="721D32"/>
                 </a:solidFill>
               </a:rPr>
               <a:t>사진 5</a:t>
@@ -5710,11 +5710,11 @@
             </a:avLst>
           </a:prstGeom>
           <a:solidFill>
-            <a:srgbClr val="F3CED7"/>
+            <a:srgbClr val="F7D4DD"/>
           </a:solidFill>
           <a:ln w="19050">
             <a:solidFill>
-              <a:srgbClr val="D1617D"/>
+              <a:srgbClr val="DB3D65"/>
             </a:solidFill>
             <a:prstDash val="dash"/>
           </a:ln>
@@ -5733,7 +5733,7 @@
             <a:r>
               <a:rPr sz="1200" b="0" i="0">
                 <a:solidFill>
-                  <a:srgbClr val="9E2E4A"/>
+                  <a:srgbClr val="721D32"/>
                 </a:solidFill>
               </a:rPr>
               <a:t>사진 6</a:t>
@@ -5813,7 +5813,7 @@
             <a:r>
               <a:rPr sz="3400" b="1" i="0">
                 <a:solidFill>
-                  <a:srgbClr val="9E2E4A"/>
+                  <a:srgbClr val="721D32"/>
                 </a:solidFill>
               </a:rPr>
               <a:t>와 주셔서 고맙습니다</a:t>
@@ -5851,7 +5851,7 @@
             <a:r>
               <a:rPr sz="1700" b="0" i="1">
                 <a:solidFill>
-                  <a:srgbClr val="9E2E4A"/>
+                  <a:srgbClr val="721D32"/>
                 </a:solidFill>
               </a:rPr>
               <a:t>잘 살겠습니다</a:t>
@@ -5916,34 +5916,34 @@
         <a:sysClr val="window" lastClr="FFFFFF"/>
       </a:lt1>
       <a:dk2>
-        <a:srgbClr val="9E2E4A"/>
+        <a:srgbClr val="721D32"/>
       </a:dk2>
       <a:lt2>
-        <a:srgbClr val="FAEFF2"/>
+        <a:srgbClr val="FCF3F5"/>
       </a:lt2>
       <a:accent1>
-        <a:srgbClr val="D1617D"/>
+        <a:srgbClr val="DB3D65"/>
       </a:accent1>
       <a:accent2>
-        <a:srgbClr val="3B9151"/>
+        <a:srgbClr val="339941"/>
       </a:accent2>
       <a:accent3>
-        <a:srgbClr val="9E2E4A"/>
+        <a:srgbClr val="721D32"/>
       </a:accent3>
       <a:accent4>
-        <a:srgbClr val="F3CED7"/>
+        <a:srgbClr val="F7D4DD"/>
       </a:accent4>
       <a:accent5>
-        <a:srgbClr val="867967"/>
+        <a:srgbClr val="876B53"/>
       </a:accent5>
       <a:accent6>
-        <a:srgbClr val="C58292"/>
+        <a:srgbClr val="AA7784"/>
       </a:accent6>
       <a:hlink>
-        <a:srgbClr val="D1617D"/>
+        <a:srgbClr val="DB3D65"/>
       </a:hlink>
       <a:folHlink>
-        <a:srgbClr val="9E2E4A"/>
+        <a:srgbClr val="721D32"/>
       </a:folHlink>
     </a:clrScheme>
     <a:fontScheme name="Office">
